--- a/set/2026-07-12 El Camino Baptist Church-CH.pptx
+++ b/set/2026-07-12 El Camino Baptist Church-CH.pptx
@@ -300,7 +300,7 @@
           <a:p>
             <a:fld id="{5448A3D2-9408-4143-A73F-7F223505335E}" type="datetimeFigureOut">
               <a:rPr lang="en-US" smtClean="0"/>
-              <a:t>7/11/26</a:t>
+              <a:t>7/12/26</a:t>
             </a:fld>
             <a:endParaRPr lang="en-US"/>
           </a:p>
@@ -498,7 +498,7 @@
           <a:p>
             <a:fld id="{5448A3D2-9408-4143-A73F-7F223505335E}" type="datetimeFigureOut">
               <a:rPr lang="en-US" smtClean="0"/>
-              <a:t>7/11/26</a:t>
+              <a:t>7/12/26</a:t>
             </a:fld>
             <a:endParaRPr lang="en-US"/>
           </a:p>
@@ -706,7 +706,7 @@
           <a:p>
             <a:fld id="{5448A3D2-9408-4143-A73F-7F223505335E}" type="datetimeFigureOut">
               <a:rPr lang="en-US" smtClean="0"/>
-              <a:t>7/11/26</a:t>
+              <a:t>7/12/26</a:t>
             </a:fld>
             <a:endParaRPr lang="en-US"/>
           </a:p>
@@ -904,7 +904,7 @@
           <a:p>
             <a:fld id="{5448A3D2-9408-4143-A73F-7F223505335E}" type="datetimeFigureOut">
               <a:rPr lang="en-US" smtClean="0"/>
-              <a:t>7/11/26</a:t>
+              <a:t>7/12/26</a:t>
             </a:fld>
             <a:endParaRPr lang="en-US"/>
           </a:p>
@@ -1179,7 +1179,7 @@
           <a:p>
             <a:fld id="{5448A3D2-9408-4143-A73F-7F223505335E}" type="datetimeFigureOut">
               <a:rPr lang="en-US" smtClean="0"/>
-              <a:t>7/11/26</a:t>
+              <a:t>7/12/26</a:t>
             </a:fld>
             <a:endParaRPr lang="en-US"/>
           </a:p>
@@ -1444,7 +1444,7 @@
           <a:p>
             <a:fld id="{5448A3D2-9408-4143-A73F-7F223505335E}" type="datetimeFigureOut">
               <a:rPr lang="en-US" smtClean="0"/>
-              <a:t>7/11/26</a:t>
+              <a:t>7/12/26</a:t>
             </a:fld>
             <a:endParaRPr lang="en-US"/>
           </a:p>
@@ -1856,7 +1856,7 @@
           <a:p>
             <a:fld id="{5448A3D2-9408-4143-A73F-7F223505335E}" type="datetimeFigureOut">
               <a:rPr lang="en-US" smtClean="0"/>
-              <a:t>7/11/26</a:t>
+              <a:t>7/12/26</a:t>
             </a:fld>
             <a:endParaRPr lang="en-US"/>
           </a:p>
@@ -1997,7 +1997,7 @@
           <a:p>
             <a:fld id="{5448A3D2-9408-4143-A73F-7F223505335E}" type="datetimeFigureOut">
               <a:rPr lang="en-US" smtClean="0"/>
-              <a:t>7/11/26</a:t>
+              <a:t>7/12/26</a:t>
             </a:fld>
             <a:endParaRPr lang="en-US"/>
           </a:p>
@@ -2110,7 +2110,7 @@
           <a:p>
             <a:fld id="{5448A3D2-9408-4143-A73F-7F223505335E}" type="datetimeFigureOut">
               <a:rPr lang="en-US" smtClean="0"/>
-              <a:t>7/11/26</a:t>
+              <a:t>7/12/26</a:t>
             </a:fld>
             <a:endParaRPr lang="en-US"/>
           </a:p>
@@ -2421,7 +2421,7 @@
           <a:p>
             <a:fld id="{5448A3D2-9408-4143-A73F-7F223505335E}" type="datetimeFigureOut">
               <a:rPr lang="en-US" smtClean="0"/>
-              <a:t>7/11/26</a:t>
+              <a:t>7/12/26</a:t>
             </a:fld>
             <a:endParaRPr lang="en-US"/>
           </a:p>
@@ -2709,7 +2709,7 @@
           <a:p>
             <a:fld id="{5448A3D2-9408-4143-A73F-7F223505335E}" type="datetimeFigureOut">
               <a:rPr lang="en-US" smtClean="0"/>
-              <a:t>7/11/26</a:t>
+              <a:t>7/12/26</a:t>
             </a:fld>
             <a:endParaRPr lang="en-US"/>
           </a:p>
@@ -2950,7 +2950,7 @@
           <a:p>
             <a:fld id="{5448A3D2-9408-4143-A73F-7F223505335E}" type="datetimeFigureOut">
               <a:rPr lang="en-US" smtClean="0"/>
-              <a:t>7/11/26</a:t>
+              <a:t>7/12/26</a:t>
             </a:fld>
             <a:endParaRPr lang="en-US"/>
           </a:p>
@@ -6028,6 +6028,45 @@
           </a:p>
         </p:txBody>
       </p:sp>
+      <p:sp>
+        <p:nvSpPr>
+          <p:cNvPr id="2" name="TextBox 1">
+            <a:extLst>
+              <a:ext uri="{FF2B5EF4-FFF2-40B4-BE49-F238E27FC236}">
+                <a16:creationId xmlns:a16="http://schemas.microsoft.com/office/drawing/2014/main" id="{FD74ABEA-A731-76A7-4FD3-64BF331CBF60}"/>
+              </a:ext>
+            </a:extLst>
+          </p:cNvPr>
+          <p:cNvSpPr txBox="1"/>
+          <p:nvPr/>
+        </p:nvSpPr>
+        <p:spPr>
+          <a:xfrm>
+            <a:off x="10962255" y="6109102"/>
+            <a:ext cx="1007007" cy="584775"/>
+          </a:xfrm>
+          <a:prstGeom prst="rect">
+            <a:avLst/>
+          </a:prstGeom>
+          <a:noFill/>
+        </p:spPr>
+        <p:txBody>
+          <a:bodyPr wrap="none" rtlCol="0">
+            <a:spAutoFit/>
+          </a:bodyPr>
+          <a:lstStyle/>
+          <a:p>
+            <a:r>
+              <a:rPr lang="en-US" sz="3200" b="1" dirty="0">
+                <a:solidFill>
+                  <a:schemeClr val="bg1"/>
+                </a:solidFill>
+              </a:rPr>
+              <a:t>END</a:t>
+            </a:r>
+          </a:p>
+        </p:txBody>
+      </p:sp>
     </p:spTree>
     <p:extLst>
       <p:ext uri="{BB962C8B-B14F-4D97-AF65-F5344CB8AC3E}">
@@ -13062,7 +13101,7 @@
                 </a:solidFill>
                 <a:latin typeface="Avenir Book" panose="02000503020000020003" pitchFamily="2" charset="0"/>
               </a:rPr>
-              <a:t>                           Em                C</a:t>
+              <a:t>                           Em                C  </a:t>
             </a:r>
             <a:r>
               <a:rPr lang="en-US" sz="4000" dirty="0">
